--- a/decks/Microsoft Foundry Prompt Caching.pptx
+++ b/decks/Microsoft Foundry Prompt Caching.pptx
@@ -131,17 +131,6 @@
 </p:presentation>
 </file>
 
-<file path=ppt/revisionInfo.xml><?xml version="1.0" encoding="utf-8"?>
-<p1510:revInfo xmlns:a="http://schemas.openxmlformats.org/drawingml/2006/main" xmlns:r="http://schemas.openxmlformats.org/officeDocument/2006/relationships" xmlns:p1510="http://schemas.microsoft.com/office/powerpoint/2015/10/main">
-  <p1510:revLst>
-    <p1510:client id="{790F6B56-3021-46E7-A4AD-1D49E5F161C6}" v="2" dt="2026-09-24T08:40:01.847"/>
-    <p1510:client id="{9296F112-39EA-4C16-88A0-D3DBB6267684}" v="11" dt="2026-09-23T12:49:30.867"/>
-    <p1510:client id="{CE8A4501-D537-4D82-ADE4-9588955FD696}" v="8" dt="2026-09-23T20:04:43.918"/>
-    <p1510:client id="{F642F950-5702-40E0-9E6C-C0B858B11948}" v="1" dt="2026-09-23T20:20:57.798"/>
-  </p1510:revLst>
-</p1510:revInfo>
-</file>
-
 <file path=ppt/changesInfos/changesInfo1.xml><?xml version="1.0" encoding="utf-8"?>
 <pc:chgInfo xmlns:a="http://schemas.openxmlformats.org/drawingml/2006/main" xmlns:r="http://schemas.openxmlformats.org/officeDocument/2006/relationships" xmlns:ac="http://schemas.microsoft.com/office/drawing/2013/main/command" xmlns:pc="http://schemas.microsoft.com/office/powerpoint/2013/main/command">
   <pc:docChgLst>
@@ -181,30 +170,6 @@
           <pc:docMk/>
           <pc:sldMk cId="3948622614" sldId="659"/>
         </pc:sldMkLst>
-        <pc:spChg chg="del">
-          <ac:chgData name="" userId="" providerId="" clId="Web-{790F6B56-3021-46E7-A4AD-1D49E5F161C6}" dt="2026-09-24T08:37:02.466" v="0" actId="34807"/>
-          <ac:spMkLst>
-            <pc:docMk/>
-            <pc:sldMk cId="3948622614" sldId="659"/>
-            <ac:spMk id="26431" creationId="{D62C1647-AF38-A345-55AD-FF2961A244D8}"/>
-          </ac:spMkLst>
-        </pc:spChg>
-        <pc:spChg chg="del">
-          <ac:chgData name="" userId="" providerId="" clId="Web-{790F6B56-3021-46E7-A4AD-1D49E5F161C6}" dt="2026-09-24T08:37:02.466" v="0" actId="34807"/>
-          <ac:spMkLst>
-            <pc:docMk/>
-            <pc:sldMk cId="3948622614" sldId="659"/>
-            <ac:spMk id="26539" creationId="{A67C4825-A722-E627-F053-19D7783980D1}"/>
-          </ac:spMkLst>
-        </pc:spChg>
-        <pc:spChg chg="del">
-          <ac:chgData name="" userId="" providerId="" clId="Web-{790F6B56-3021-46E7-A4AD-1D49E5F161C6}" dt="2026-09-24T08:37:02.466" v="0" actId="34807"/>
-          <ac:spMkLst>
-            <pc:docMk/>
-            <pc:sldMk cId="3948622614" sldId="659"/>
-            <ac:spMk id="26577" creationId="{6CE0DFBC-7714-C292-4276-EC05B9062631}"/>
-          </ac:spMkLst>
-        </pc:spChg>
         <pc:spChg chg="mod">
           <ac:chgData name="" userId="" providerId="" clId="Web-{790F6B56-3021-46E7-A4AD-1D49E5F161C6}" dt="2026-09-24T08:37:02.466" v="0" actId="34807"/>
           <ac:spMkLst>
@@ -1327,6 +1292,57 @@
     </pc:docChg>
   </pc:docChgLst>
   <pc:docChgLst>
+    <pc:chgData clId="Web-{5E2AE23D-4C3F-4471-AC33-0E20FE3D5706}"/>
+    <pc:docChg chg="modSld">
+      <pc:chgData name="" userId="" providerId="" clId="Web-{5E2AE23D-4C3F-4471-AC33-0E20FE3D5706}" dt="2026-10-14T14:09:33.454" v="0" actId="34807"/>
+      <pc:docMkLst>
+        <pc:docMk/>
+      </pc:docMkLst>
+      <pc:sldChg chg="modNotesTx">
+        <pc:chgData name="" userId="" providerId="" clId="Web-{5E2AE23D-4C3F-4471-AC33-0E20FE3D5706}" dt="2026-10-14T14:09:33.454" v="0" actId="34807"/>
+        <pc:sldMkLst>
+          <pc:docMk/>
+          <pc:sldMk cId="0" sldId="256"/>
+        </pc:sldMkLst>
+      </pc:sldChg>
+      <pc:sldChg chg="modNotesTx">
+        <pc:chgData name="" userId="" providerId="" clId="Web-{5E2AE23D-4C3F-4471-AC33-0E20FE3D5706}" dt="2026-10-14T14:09:33.454" v="0" actId="34807"/>
+        <pc:sldMkLst>
+          <pc:docMk/>
+          <pc:sldMk cId="620387571" sldId="457"/>
+        </pc:sldMkLst>
+      </pc:sldChg>
+      <pc:sldChg chg="modNotesTx">
+        <pc:chgData name="" userId="" providerId="" clId="Web-{5E2AE23D-4C3F-4471-AC33-0E20FE3D5706}" dt="2026-10-14T14:09:33.454" v="0" actId="34807"/>
+        <pc:sldMkLst>
+          <pc:docMk/>
+          <pc:sldMk cId="3948622614" sldId="659"/>
+        </pc:sldMkLst>
+      </pc:sldChg>
+      <pc:sldChg chg="modNotesTx">
+        <pc:chgData name="" userId="" providerId="" clId="Web-{5E2AE23D-4C3F-4471-AC33-0E20FE3D5706}" dt="2026-10-14T14:09:33.454" v="0" actId="34807"/>
+        <pc:sldMkLst>
+          <pc:docMk/>
+          <pc:sldMk cId="343108110" sldId="862"/>
+        </pc:sldMkLst>
+      </pc:sldChg>
+      <pc:sldChg chg="modNotesTx">
+        <pc:chgData name="" userId="" providerId="" clId="Web-{5E2AE23D-4C3F-4471-AC33-0E20FE3D5706}" dt="2026-10-14T14:09:33.454" v="0" actId="34807"/>
+        <pc:sldMkLst>
+          <pc:docMk/>
+          <pc:sldMk cId="2961734150" sldId="1066"/>
+        </pc:sldMkLst>
+      </pc:sldChg>
+      <pc:sldChg chg="modNotesTx">
+        <pc:chgData name="" userId="" providerId="" clId="Web-{5E2AE23D-4C3F-4471-AC33-0E20FE3D5706}" dt="2026-10-14T14:09:33.454" v="0" actId="34807"/>
+        <pc:sldMkLst>
+          <pc:docMk/>
+          <pc:sldMk cId="400761626" sldId="1271"/>
+        </pc:sldMkLst>
+      </pc:sldChg>
+    </pc:docChg>
+  </pc:docChgLst>
+  <pc:docChgLst>
     <pc:chgData clId="Web-{9296F112-39EA-4C16-88A0-D3DBB6267684}"/>
     <pc:docChg chg="mod addSld modSld modMainMaster setSldSz">
       <pc:chgData name="" userId="" providerId="" clId="Web-{9296F112-39EA-4C16-88A0-D3DBB6267684}" dt="2026-09-23T12:51:36.999" v="25" actId="34807"/>
@@ -2374,7 +2390,7 @@
           </a:lstStyle>
           <a:p>
             <a:fld id="{090D1257-65BD-4E6F-8B07-C1EECB89DBB0}" type="datetimeFigureOut">
-              <a:t>11/10/2026</a:t>
+              <a:t>10/14/2026</a:t>
             </a:fld>
             <a:endParaRPr lang="en-US"/>
           </a:p>
@@ -2686,7 +2702,20 @@
           <a:p>
             <a:r>
               <a:rPr lang="en-US"/>
-              <a:t>Prompt caching is not a provisioned resource; it is a property of how the prompt is constructed. The service retains the token computations produced while reading the input, so the identical leading tokens of a prompt — the prefix — are not processed again on subsequent requests. This deck is the twenty-minute cut of a longer deep dive: six slides, the same verified facts, no rates. Not stated on the slide: prompt caching is enabled by default for supported models, and it changes nothing about output content beyond latency and cost. The cover figure states the mechanism: the identical prefix is reused across calls, and only the new input is processed on each request. Scope limits to establish early: caching does not apply to short prompts, and it does not apply where the leading tokens change on every request. Backing page: https://learn.microsoft.com/en-us/azure/foundry/openai/how-to/prompt-caching. Anticipated question: does prompt caching require enablement? Answer: no. It is enabled by default for supported models; the work is in prompt structure, not configuration.</a:t>
+              <a:t>This session covers prompt caching in Azure OpenAI, in Microsoft Foundry Models: reduced latency and cost for prompts with identical leading content.
+The core idea is that prompt caching is not a provisioned resource; it is a property of how the prompt is constructed. The service retains the token computations produced while reading the input, so the identical leading tokens of a prompt, the prefix, are not processed again on subsequent requests.
+The cover figure states the mechanism: the identical prefix is reused across calls, and only the new input is processed on each request.
+This deck is the twenty-minute cut of a longer deep dive: six slides, the same verified facts, and no rates.
+Two points are not stated on the slide. Prompt caching is enabled by default for supported models, and it changes nothing about output content beyond latency and cost.
+Two scope limits should be established early: caching does not apply to short prompts, and it does not apply where the leading tokens change on every request.
+We begin with the definitions and the position of the prompt cache in the request path.
+We then examine cache eligibility and matching.
+The third part covers the configuration options.
+The fourth part covers limits, monitoring and data boundaries.
+We close with the comparison between prompt caching and semantic caching.
+The backing page in the official documentation is https://learn.microsoft.com/en-us/azure/foundry/openai/how-to/prompt-caching.
+A common question is whether prompt caching requires enablement. It does not: it is enabled by default for supported models, and the work is in prompt structure, not configuration.
+The overall narrative is simple: prompt caching is already on for supported models, and the benefit depends on how the prompt is built.</a:t>
             </a:r>
           </a:p>
         </p:txBody>
@@ -2772,7 +2801,21 @@
           <a:p>
             <a:r>
               <a:rPr lang="en-US"/>
-              <a:t>There is no cache resource to create, size or flush. The cache is influenced only through prompt structure. Diagram, left to right: the client application calls the deployment, optionally through Azure API Management acting as an AI gateway; the deployment is either Standard pay-as-you-go or Provisioned Throughput managed; the request lands on a single model serving machine, and the prompt cache — the key-value (KV) tensors computed while the model read the input — resides on that machine. The boundary is dashed for that reason: cache scope is a single serving machine. Not stated on the slide: the cache stores computed state, not prompt text, and a cache hit requires the prefix to match exactly. A first request performs a full prefill; this is expected behaviour. A gateway does not add prompt caching; that is semantic caching, covered on the final slide. Backing page: https://learn.microsoft.com/en-us/azure/foundry/openai/how-to/prompt-caching. Presenter checklist: verify current cached-input and cache-write rates on the Azure OpenAI pricing page before presenting — Learn states the discount qualitatively and directs to the pricing page for rates. Anticipated question: does prompt caching require enablement? Answer: no; it is enabled by default for supported models.</a:t>
+              <a:t>This slide explains what prompt caching is and where the prompt cache sits within the request path. Read the diagram from left to right.
+The core idea is that there is no cache resource to create, size or flush. The cache is influenced only through prompt structure.
+First, the definitions.
+Prompt caching reduces request latency and cost for prompts with identical content at the beginning, and it is enabled by default for supported models. The prompt is the full input sent with a chat completion or response request: instructions, tool definitions, examples and prior conversation turns. The prefix is the leading portion of the rendered prompt, and caching applies to the prefix that is identical across requests. A cache hit is a match between a prompt's token computations and current cache content, and output content is unchanged by caching.
+Second, the client application and the gateway.
+The customer-owned client application calls the deployment, optionally through Azure API Management acting as an AI gateway. A gateway does not add prompt caching; what a gateway adds is semantic caching, covered on the final slide.
+Third, the deployment.
+The deployment is either Standard pay-as-you-go or Provisioned Throughput managed, PTU-M.
+Fourth, the model serving machine.
+The request lands on a single model serving machine, and the prompt cache resides on that machine. The cache is the key-value, or KV, tensors computed while the model read the input. The boundary is dashed for that reason: cache scope is a single serving machine.
+Two points are not stated on the slide. The cache stores computed state, not prompt text, and a cache hit requires the prefix to match exactly. A first request performs a full prefill, which is expected behaviour.
+The official documentation states the discount qualitatively and directs readers to the Azure OpenAI pricing page for rates, so the current cached-input and cache-write rates should be confirmed there before presenting.
+The backing page is https://learn.microsoft.com/en-us/azure/foundry/openai/how-to/prompt-caching.
+A common question is whether prompt caching requires enablement. It does not: it is enabled by default for supported models.
+The key takeaway is that the cache lives on the serving machine and is shaped only by the prompt.</a:t>
             </a:r>
           </a:p>
         </p:txBody>
@@ -2858,7 +2901,19 @@
           <a:p>
             <a:r>
               <a:rPr lang="en-US"/>
-              <a:t>Sequence, left: request rendered, prefix routed, longest matching cached prefix retrieved; a hit reuses stored token computations, a miss runs the full prefill. Token counting, right: prompt caching supports the complete messages array — system, developer, user and assistant content, and tool definitions — and a structured output schema is appended as a prefix to the system message. The minimum is 1,024 tokens, and the first 1,024 tokens must be identical; a single character difference within them produces a cache miss, reported as a cached_tokens value of 0. Matching is positional across the rendered prompt; it is not evaluated per message type. Upper bar: the boundary falls inside the system message; the identical prefix is complete before the first user turn. Lower bar: a shorter system message places the boundary inside conversation turns, which must then also be identical across requests. Images in user messages are cacheable, as links or base64-encoded data, with the detail parameter set identically across requests. Guidance: structure requests so that repetitive content occurs at the beginning of the messages array. Anticipated question: can the serving machine be selected? Answer: not directly; prompt_cache_key is the routing signal, and approximately 15 requests per minute per prefix-and-key combination occur before misses appear, so distribute across keys while keeping a stable key-to-prefix mapping.</a:t>
+              <a:t>This slide explains cache eligibility and matching. Read it in three parts: the sequence, token counting and cache-miss conditions.
+The core idea is that the longest matching cached prefix is reused, and a cache breakpoint marks the end of a reusable prefix.
+First, the request sequence.
+The request is rendered, the prefix is routed to a serving machine, and the longest matching cached prefix is retrieved. A hit reuses stored token computations; a miss runs the full prefill and writes the result to the cache. Output tokens are generated for every request and are never cached.
+Second, token counting.
+Prompt caching supports the complete messages array: system, developer, user and assistant content, and tool definitions. A structured output schema is appended as a prefix to the system message. The minimum is 1,024 tokens, and the first 1,024 tokens must be identical. A single character difference within them produces a cache miss, reported as a cached_tokens value of 0. Matching is positional across the rendered prompt; it is not evaluated per message type.
+In the upper bar, the boundary falls inside the system message, so the identical prefix is complete before the first user turn and variable content in conversation turns does not affect matching. In the lower bar, a shorter system message places the boundary inside conversation turns, which must then also be identical across requests.
+Images in user messages are cacheable, as links or base64-encoded data, with the detail parameter set identically across requests.
+Third, the conditions that produce a cache miss.
+These are variable leading content such as timestamps, modified tool definitions, and history that is summarised or reordered rather than appended.
+The guidance is to structure requests so that repetitive content occurs at the beginning of the messages array.
+A common question is whether the serving machine can be selected. Not directly: prompt_cache_key is the routing signal, and approximately 15 requests per minute per prefix-and-key combination occur before misses appear, so load should be distributed across keys while keeping a stable key-to-prefix mapping.
+The key takeaway is to place stable content at the beginning of the prompt and dynamic content at the end.</a:t>
             </a:r>
           </a:p>
         </p:txBody>
@@ -2944,7 +2999,19 @@
           <a:p>
             <a:r>
               <a:rPr lang="en-US"/>
-              <a:t>Three independent decisions; one of them is a code change. Caching mode determines where the reusable prefix ends. A breakpoint marks that end. Implicit is the default: a breakpoint is placed on the latest message, and explicit breakpoints supplied in the request are also used. Deployment type determines what is configurable at all: on Provisioned Throughput managed there is nothing to configure, so the discussion there concerns prompt structure only. Retention determines how long a prefix stays eligible; 30m is a minimum, not an expiry guarantee, and the service may retain a cached prefix longer. The band at the foot is the model-family split: requests that include prompt_cache_options or prompt_cache_breakpoint on GPT-5.5 and earlier return a 400 error, and those models continue with implicit prompt caching. Not stated on the slide: extended retention operates by offloading key-value tensors to GPU-local storage when memory is full, for up to 24 hours. Backing page: https://learn.microsoft.com/en-us/azure/foundry/openai/how-to/prompt-caching. Presenter checklist: verify the extended-retention model list against Learn before presenting; model lists change. Anticipated question: do existing calls fail on upgrade? Answer: only where newer parameters are sent to an earlier model.</a:t>
+              <a:t>This slide lists the configuration options for prompt caching. Read it from left to right.
+The core idea is that these are three independent decisions, and one of them is a code change.
+First, caching mode.
+It determines where the reusable prefix ends, and a breakpoint marks that end. Implicit is the default: a breakpoint is placed on the latest message, and explicit breakpoints supplied in the request are also used. In explicit mode only explicit breakpoints are used, and a request without one does not use caching. 
+Second, deployment type.
+It determines what is configurable at all. Standard pay-as-you-go supports breakpoints, reports cache_write_tokens and bills cache reads at a discount on input token pricing. Provisioned Throughput managed supports prompt caching with up to a 100% discount on input tokens, but does not support breakpoints or report cache_write_tokens. There is nothing to configure there, so the discussion concerns prompt structure only.
+Third, retention control.
+It determines how long a prefix stays eligible. On GPT-5.6 and later, prompt_cache_options.ttl sets a minimum cache lifetime, where 30m is the default and the only supported value. It is a minimum, not an expiry guarantee, and the service may retain a cached prefix longer. On earlier models, prompt_cache_retention selects a maximum-retention policy; it is deprecated and not applicable on GPT-5.6 and later.
+Fourth, the model-family split.
+Requests that include prompt_cache_options or prompt_cache_breakpoint on GPT-5.5 and earlier return a 400 error, and those models continue with implicit prompt caching. Cache writes may incur charges on GPT-5.6 and later, but not on earlier models. Extended retention is available on a published list of earlier models and enabled by default for gpt-5.5. Not stated on the slide, extended retention offloads key-value tensors to GPU-local storage when memory is full, for up to 24 hours.
+Model lists change, so the extended-retention model list should be confirmed against the official documentation before presenting. The backing page is https://learn.microsoft.com/en-us/azure/foundry/openai/how-to/prompt-caching.
+A common question is whether existing calls fail on upgrade. They fail only where newer parameters are sent to an earlier model.
+The key takeaway is to check the model family before sending any caching parameter.</a:t>
             </a:r>
           </a:p>
         </p:txBody>
@@ -3030,7 +3097,17 @@
           <a:p>
             <a:r>
               <a:rPr lang="en-US"/>
-              <a:t>Two response fields carry the measurement, and three distinct boundaries apply. cached_tokens, under prompt_tokens_details, reports cache reads; cache_write_tokens, where available, reports cache writes. The ratio between them is the metric to graph. Not stated on the slide: in implicit mode the breakpoint placed on the latest message consumes one of the four cache-write slots, leaving the latest three explicit breakpoints, and breakpoints from earlier conversation turns match but are not rewritten. Where separate accounting or routing is required, set prompt_cache_key and reuse the same key for requests sharing long common prefixes; approximately 15 requests per minute per prefix-and-key combination occur before misses appear, so distribute across multiple keys while keeping a stable key-to-prefix mapping. Boundaries: prompt caches are not shared between Azure subscriptions; cached states reside on individual serving machines, so reuse depends on reaching a machine holding a matching, unexpired entry; residency depends on in-memory retention versus extended retention. Backing page: https://learn.microsoft.com/en-us/azure/foundry/openai/how-to/prompt-caching. Presenter checklist: confirm the customer's deployment type and data zone before making residency claims. Anticipated question: cached_tokens remains 0. Answer: verify the leading 1,024 tokens are byte-identical first.</a:t>
+              <a:t>This slide covers limits, monitoring and data boundaries.
+The core idea is that two response fields carry the measurement, and three distinct boundaries apply.
+First, the limits.
+The minimum is 1,024 tokens, and the first 1,024 tokens must be identical. A request can make up to four new cache writes, and up to the latest 50 breakpoints are considered for cache reads. Not stated on the slide, in implicit mode the breakpoint placed on the latest message consumes one of the four cache-write slots, leaving the latest three explicit breakpoints. Breakpoints from earlier conversation turns are read-only: they match but are not rewritten. In-memory caches clear within 5 to 10 minutes of inactivity, and within one hour of last use.
+Second, monitoring.
+cached_tokens, under prompt_tokens_details, reports cache reads, and cache_write_tokens, where available, reports cache writes. The ratio between them is the metric to graph. A sustained cached_tokens value of 0 indicates that the prefix is not matching. Where separate accounting or routing is required, the client application sets prompt_cache_key and reuses the same key for requests sharing long common prefixes. Approximately 15 requests per minute per prefix-and-key combination occur before misses appear, so requests should be distributed across multiple keys while keeping a stable key-to-prefix mapping.
+Third, the boundaries.
+Prompt caches are not shared between Azure subscriptions. Cached states reside on individual serving machines and are not shared across the pool, so reuse depends on reaching a machine holding a matching, unexpired entry. Residency depends on in-memory retention versus extended retention. In-memory retention is compatible with all data residency regions. Extended retention stores data on GPU machines for up to 24 hours, and remains within the data zone boundary for Data Zone deployment types and the regional boundary for Regional deployment types.
+The customer's deployment type and data zone should be confirmed before making residency claims. The backing page is https://learn.microsoft.com/en-us/azure/foundry/openai/how-to/prompt-caching.
+On a cached_tokens value that remains 0, the first check is whether the leading 1,024 tokens are byte-identical.
+The key takeaway is that cached_tokens is the signal to watch, and residency follows from the retention mode.</a:t>
             </a:r>
           </a:p>
         </p:txBody>
@@ -3116,7 +3193,21 @@
           <a:p>
             <a:r>
               <a:rPr lang="en-US"/>
-              <a:t>The names are similar; the mechanisms are distinct and complementary. Prompt caching reuses the model's token computations for an exactly matching prefix inside the inference path; the model still runs, so output content is unaffected beyond latency and cost. Semantic caching reuses a stored response for an identical or similar prompt, in front of the model; on a hit the model is not called. Its control is the score-threshold attribute, where a lower threshold requires higher semantic similarity. Operational weight differs: semantic caching requires policies, an embeddings deployment and an Azure Managed Redis instance with RediSearch; prompt caching requires no resources. Adoption sequence, four phases: measure cached_tokens per deployment before changes; restructure so stable content leads and dynamic values trail, with append-only history; control, using breakpoints and a stable prompt_cache_key where the model family allows it; then operate, monitoring the read-to-write ratio and treating a sudden drop as a regression. On GPT-5.6 and later, cache writes may incur charges in addition to discounted reads; prefix churn carries cost. References: https://learn.microsoft.com/en-us/azure/foundry/openai/how-to/prompt-caching ; https://developers.openai.com/api/docs/guides/prompt-caching ; https://learn.microsoft.com/en-us/azure/api-management/azure-openai-enable-semantic-caching ; and the Azure OpenAI pricing page. Anticipated question: must one be chosen over the other? Answer: no; they operate at different layers and run together.</a:t>
+              <a:t>This slide compares prompt caching with semantic caching. Read it row by row.
+The core idea is that the names are similar, but the mechanisms are distinct and complementary.
+First, the content reused.
+Prompt caching reuses the model's processed input token computations, the KV tensors, for an exactly matching prefix inside the inference path. The model still runs, so output content is unaffected beyond latency and cost. Semantic caching reuses the stored response to an earlier request; on a hit, the model is not called.
+Second, the match criterion.
+For prompt caching, the rendered prefix must match exactly, and a single differing character produces a cache miss. Semantic caching matches identical prompts and prompts similar in meaning where the text differs. Its control is the score-threshold attribute, where a lower threshold requires higher semantic similarity.
+Third, the position in the request path.
+Prompt caching sits within the model service and is enabled by default for supported models. Semantic caching sits in front of the model, in the Azure API Management gateway.
+Fourth, the components to operate.
+Prompt caching requires no resources, only prompt structure, breakpoints and prompt_cache_key. Semantic caching requires the llm-semantic-cache-lookup and llm-semantic-cache-store policies, an embeddings deployment, and an Azure Managed Redis instance with the RediSearch module.
+The lower rows show that prompt caching suits long, stable leading content and sustained volume against one prefix, not unique or personalised requests.
+The adoption sequence has four phases: measure cached_tokens per deployment before changes; restructure so stable content leads and dynamic values trail, with append-only history; control, using breakpoints and a stable prompt_cache_key where the model family allows it; then operate, monitoring the read-to-write ratio and treating a sudden drop as a regression. On GPT-5.6 and later, cache writes may incur charges in addition to discounted reads, so prefix churn carries cost.
+The references are https://learn.microsoft.com/en-us/azure/foundry/openai/how-to/prompt-caching, https://developers.openai.com/api/docs/guides/prompt-caching, https://learn.microsoft.com/en-us/azure/api-management/azure-openai-enable-semantic-caching and the Azure OpenAI pricing page.
+A common question is whether one must be chosen over the other. It need not: they operate at different layers and run together.
+The key takeaway is that prompt caching reuses computation, semantic caching reuses responses, and the two work together.</a:t>
             </a:r>
           </a:p>
         </p:txBody>
@@ -3335,7 +3426,7 @@
           <a:p>
             <a:fld id="{5BCAD085-E8A6-8845-BD4E-CB4CCA059FC4}" type="datetimeFigureOut">
               <a:rPr lang="en-US" smtClean="0"/>
-              <a:t>10/11/2026</a:t>
+              <a:t>10/14/2026</a:t>
             </a:fld>
             <a:endParaRPr lang="en-US"/>
           </a:p>
@@ -3503,7 +3594,7 @@
           <a:p>
             <a:fld id="{5BCAD085-E8A6-8845-BD4E-CB4CCA059FC4}" type="datetimeFigureOut">
               <a:rPr lang="en-US" smtClean="0"/>
-              <a:t>10/11/2026</a:t>
+              <a:t>10/14/2026</a:t>
             </a:fld>
             <a:endParaRPr lang="en-US"/>
           </a:p>
@@ -3681,7 +3772,7 @@
           <a:p>
             <a:fld id="{5BCAD085-E8A6-8845-BD4E-CB4CCA059FC4}" type="datetimeFigureOut">
               <a:rPr lang="en-US" smtClean="0"/>
-              <a:t>10/11/2026</a:t>
+              <a:t>10/14/2026</a:t>
             </a:fld>
             <a:endParaRPr lang="en-US"/>
           </a:p>
@@ -3849,7 +3940,7 @@
           <a:p>
             <a:fld id="{5BCAD085-E8A6-8845-BD4E-CB4CCA059FC4}" type="datetimeFigureOut">
               <a:rPr lang="en-US" smtClean="0"/>
-              <a:t>10/11/2026</a:t>
+              <a:t>10/14/2026</a:t>
             </a:fld>
             <a:endParaRPr lang="en-US"/>
           </a:p>
@@ -4094,7 +4185,7 @@
           <a:p>
             <a:fld id="{5BCAD085-E8A6-8845-BD4E-CB4CCA059FC4}" type="datetimeFigureOut">
               <a:rPr lang="en-US" smtClean="0"/>
-              <a:t>10/11/2026</a:t>
+              <a:t>10/14/2026</a:t>
             </a:fld>
             <a:endParaRPr lang="en-US"/>
           </a:p>
@@ -4379,7 +4470,7 @@
           <a:p>
             <a:fld id="{5BCAD085-E8A6-8845-BD4E-CB4CCA059FC4}" type="datetimeFigureOut">
               <a:rPr lang="en-US" smtClean="0"/>
-              <a:t>10/11/2026</a:t>
+              <a:t>10/14/2026</a:t>
             </a:fld>
             <a:endParaRPr lang="en-US"/>
           </a:p>
@@ -4798,7 +4889,7 @@
           <a:p>
             <a:fld id="{5BCAD085-E8A6-8845-BD4E-CB4CCA059FC4}" type="datetimeFigureOut">
               <a:rPr lang="en-US" smtClean="0"/>
-              <a:t>10/11/2026</a:t>
+              <a:t>10/14/2026</a:t>
             </a:fld>
             <a:endParaRPr lang="en-US"/>
           </a:p>
@@ -4915,7 +5006,7 @@
           <a:p>
             <a:fld id="{5BCAD085-E8A6-8845-BD4E-CB4CCA059FC4}" type="datetimeFigureOut">
               <a:rPr lang="en-US" smtClean="0"/>
-              <a:t>10/11/2026</a:t>
+              <a:t>10/14/2026</a:t>
             </a:fld>
             <a:endParaRPr lang="en-US"/>
           </a:p>
@@ -5010,7 +5101,7 @@
           <a:p>
             <a:fld id="{5BCAD085-E8A6-8845-BD4E-CB4CCA059FC4}" type="datetimeFigureOut">
               <a:rPr lang="en-US" smtClean="0"/>
-              <a:t>10/11/2026</a:t>
+              <a:t>10/14/2026</a:t>
             </a:fld>
             <a:endParaRPr lang="en-US"/>
           </a:p>
@@ -5285,7 +5376,7 @@
           <a:p>
             <a:fld id="{5BCAD085-E8A6-8845-BD4E-CB4CCA059FC4}" type="datetimeFigureOut">
               <a:rPr lang="en-US" smtClean="0"/>
-              <a:t>10/11/2026</a:t>
+              <a:t>10/14/2026</a:t>
             </a:fld>
             <a:endParaRPr lang="en-US"/>
           </a:p>
@@ -5537,7 +5628,7 @@
           <a:p>
             <a:fld id="{5BCAD085-E8A6-8845-BD4E-CB4CCA059FC4}" type="datetimeFigureOut">
               <a:rPr lang="en-US" smtClean="0"/>
-              <a:t>10/11/2026</a:t>
+              <a:t>10/14/2026</a:t>
             </a:fld>
             <a:endParaRPr lang="en-US"/>
           </a:p>
@@ -5748,7 +5839,7 @@
           <a:p>
             <a:fld id="{5BCAD085-E8A6-8845-BD4E-CB4CCA059FC4}" type="datetimeFigureOut">
               <a:rPr lang="en-US" smtClean="0"/>
-              <a:t>10/11/2026</a:t>
+              <a:t>10/14/2026</a:t>
             </a:fld>
             <a:endParaRPr lang="en-US"/>
           </a:p>
